--- a/public/fun/pack/pptx/birthdaypro/돌잔치프리미엄_24_감사인사중심_코랄샌드.pptx
+++ b/public/fun/pack/pptx/birthdaypro/돌잔치프리미엄_24_감사인사중심_코랄샌드.pptx
@@ -112,12 +112,12 @@
   <p:extLst>
     <p:ext uri="{521415D9-36F7-43E2-AB2F-B90AF26B5E84}">
       <p14:sectionLst xmlns:p14="http://schemas.microsoft.com/office/powerpoint/2010/main">
-        <p14:section name="시작" id="{A8F5303F-640E-45BF-B393-40D75CF28A97}">
+        <p14:section name="시작" id="{49723A9C-F498-404A-AA35-182B55F0EB0E}">
           <p14:sldIdLst>
             <p14:sldId id="256"/>
           </p14:sldIdLst>
         </p14:section>
-        <p14:section name="본문" id="{CE8ECC8D-9B66-4DAE-A68D-E9AD9D2F9627}">
+        <p14:section name="본문" id="{379F8655-9363-4567-BBBF-506E4364E191}">
           <p14:sldIdLst>
             <p14:sldId id="257"/>
             <p14:sldId id="258"/>
@@ -125,7 +125,7 @@
             <p14:sldId id="260"/>
           </p14:sldIdLst>
         </p14:section>
-        <p14:section name="마무리" id="{3898912E-0323-40A1-A1A3-7D0B39CA2E9C}">
+        <p14:section name="마무리" id="{60354ACC-2B46-403C-AE41-90157F13CCC6}">
           <p14:sldIdLst>
             <p14:sldId id="261"/>
           </p14:sldIdLst>
@@ -1414,7 +1414,7 @@
             </a:lvl1pPr>
           </a:lstStyle>
           <a:p>
-            <a:fld id="{7265CAF1-FC0C-4133-8B6E-9FC19B61E6A8}" type="slidenum">
+            <a:fld id="{08473E26-4D7A-4E4D-B8AF-0D600EFA48E2}" type="slidenum">
               <a:rPr lang="en-US"/>
               <a:t>‹#›</a:t>
             </a:fld>
@@ -2063,7 +2063,7 @@
             </a:lvl1pPr>
           </a:lstStyle>
           <a:p>
-            <a:fld id="{7F5886A1-5E7F-4A94-9E2F-4967514254B3}" type="slidenum">
+            <a:fld id="{8AC03373-B3CB-4495-9474-87EBDEE3724C}" type="slidenum">
               <a:rPr lang="en-US"/>
               <a:t>‹#›</a:t>
             </a:fld>
@@ -2733,7 +2733,7 @@
             </a:lvl1pPr>
           </a:lstStyle>
           <a:p>
-            <a:fld id="{7F389F56-39E1-436D-8789-B2A69BC3F7A8}" type="slidenum">
+            <a:fld id="{365959B6-DDF0-4729-9437-76880D1EED75}" type="slidenum">
               <a:rPr lang="en-US"/>
               <a:t>‹#›</a:t>
             </a:fld>
@@ -3574,7 +3574,7 @@
           <a:p>
             <a:r>
               <a:rPr lang="ko-KR"/>
-              <a:t>더운 날씨에 오시는 길 조심하세요</a:t>
+              <a:t>오시는 길 조심해서 오세요</a:t>
             </a:r>
           </a:p>
         </p:txBody>
@@ -3596,7 +3596,7 @@
           <a:p>
             <a:r>
               <a:rPr lang="ko-KR"/>
-              <a:t>아기 이름 · 0000. 00. 00</a:t>
+              <a:t>아기 이름 · 날짜 입력</a:t>
             </a:r>
           </a:p>
           <a:p>
@@ -3759,7 +3759,7 @@
           <a:bodyPr/>
           <a:lstStyle/>
           <a:p>
-            <a:fld id="{3044EE4B-5669-43C9-94E9-B92BB2BA6EC1}" type="slidenum">
+            <a:fld id="{92B189E1-8F57-463E-A453-155D352B9FF1}" type="slidenum">
               <a:rPr lang="en-US"/>
               <a:t>‹#›</a:t>
             </a:fld>
@@ -4359,7 +4359,7 @@
           <a:bodyPr/>
           <a:lstStyle/>
           <a:p>
-            <a:fld id="{06937AFC-0597-4E50-B107-9D5FA1042219}" type="slidenum">
+            <a:fld id="{67C66E14-844E-4685-B1D9-B07039BC992D}" type="slidenum">
               <a:rPr lang="en-US"/>
               <a:t>‹#›</a:t>
             </a:fld>
@@ -4711,7 +4711,7 @@
           <a:bodyPr/>
           <a:lstStyle/>
           <a:p>
-            <a:fld id="{59B209E0-EA2A-44D2-BED7-41620441614E}" type="slidenum">
+            <a:fld id="{36C17D81-4C7B-4A14-A343-327857785E20}" type="slidenum">
               <a:rPr lang="en-US"/>
               <a:t>‹#›</a:t>
             </a:fld>
@@ -5591,7 +5591,7 @@
           <a:bodyPr/>
           <a:lstStyle/>
           <a:p>
-            <a:fld id="{46776945-3AEB-412A-B2F5-69B68E9B3DEE}" type="slidenum">
+            <a:fld id="{03FF3AE3-CB22-49F2-89FA-72196D7FFB38}" type="slidenum">
               <a:rPr lang="en-US"/>
               <a:t>‹#›</a:t>
             </a:fld>
